--- a/docs/VIT_Indie_Submission.pptx
+++ b/docs/VIT_Indie_Submission.pptx
@@ -5548,7 +5548,6 @@
                 <a:spcPts val="500"/>
               </a:spcAft>
               <a:buSzPct val="100000"/>
-              <a:buChar char="•"/>
             </a:pPr>
             <a:r>
               <a:rPr lang="en-US" sz="2400" dirty="0">
@@ -5559,7 +5558,18 @@
                 <a:ea typeface="Calibri" pitchFamily="34" charset="-122"/>
                 <a:cs typeface="Calibri" pitchFamily="34" charset="-120"/>
               </a:rPr>
-              <a:t>Demo video, max 5 minutes (YouTube or Drive link): [add link]</a:t>
+              <a:t>Demo video, max 5 minutes (YouTube or Drive link</a:t>
+            </a:r>
+            <a:r>
+              <a:rPr lang="en-US" sz="2400">
+                <a:solidFill>
+                  <a:srgbClr val="63637E"/>
+                </a:solidFill>
+                <a:latin typeface="Calibri" pitchFamily="34" charset="0"/>
+                <a:ea typeface="Calibri" pitchFamily="34" charset="-122"/>
+                <a:cs typeface="Calibri" pitchFamily="34" charset="-120"/>
+              </a:rPr>
+              <a:t>): [https://drive.google.com/drive/folders/1z7bumbo7tQ-wC3LoJkZxBfV6BFYCVT3B?usp=sharing]</a:t>
             </a:r>
             <a:endParaRPr lang="en-US" sz="2800" dirty="0"/>
           </a:p>
@@ -8219,8 +8229,8 @@
         </p:nvSpPr>
         <p:spPr>
           <a:xfrm>
-            <a:off x="548640" y="6262688"/>
-            <a:ext cx="5394960" cy="365760"/>
+            <a:off x="548640" y="6223499"/>
+            <a:ext cx="5394960" cy="430887"/>
           </a:xfrm>
           <a:prstGeom prst="rect">
             <a:avLst/>
@@ -8233,14 +8243,13 @@
           </a:bodyPr>
           <a:lstStyle/>
           <a:p>
-            <a:pPr marL="0" indent="0" algn="l">
+            <a:pPr>
               <a:spcAft>
                 <a:spcPts val="600"/>
               </a:spcAft>
-              <a:buNone/>
             </a:pPr>
             <a:r>
-              <a:rPr sz="1400" b="1" i="0">
+              <a:rPr sz="1400" b="1" i="0" dirty="0">
                 <a:solidFill>
                   <a:srgbClr val="14142B"/>
                 </a:solidFill>
@@ -8249,13 +8258,30 @@
               <a:t>Demo video: </a:t>
             </a:r>
             <a:r>
-              <a:rPr sz="1400" b="0" i="0">
+              <a:rPr sz="1400" b="0" i="0" dirty="0">
                 <a:solidFill>
                   <a:srgbClr val="6D28D9"/>
                 </a:solidFill>
                 <a:latin typeface="Calibri"/>
               </a:rPr>
-              <a:t>[YouTube / Drive link]</a:t>
+              <a:t>[</a:t>
+            </a:r>
+            <a:r>
+              <a:rPr lang="en-IN" sz="1400" dirty="0">
+                <a:solidFill>
+                  <a:srgbClr val="6D28D9"/>
+                </a:solidFill>
+              </a:rPr>
+              <a:t>https://drive.google.com/drive/folders/1z7bumbo7tQ-wC3LoJkZxBfV6BFYCVT3B?usp=sharing</a:t>
+            </a:r>
+            <a:r>
+              <a:rPr sz="1400" b="0" i="0" dirty="0">
+                <a:solidFill>
+                  <a:srgbClr val="6D28D9"/>
+                </a:solidFill>
+                <a:latin typeface="Calibri"/>
+              </a:rPr>
+              <a:t>]</a:t>
             </a:r>
           </a:p>
         </p:txBody>
